--- a/RPA Project Final Review.pptx
+++ b/RPA Project Final Review.pptx
@@ -1071,7 +1071,7 @@
           <a:lstStyle/>
           <a:p>
             <a:r>
-              <a:t>Adithya leads. Be straight about the status - dispatch and perform are tested end to end in dry-run; the three queue activities themselves have not run against a live tenant. Knowing precisely which hop is untested reads as competence. If there is time, run build.ps1 -Set @{RunMode='DISPATCH'} and then the Performer entry point, and show that the counts and the audit trail match a batch run.</a:t>
+              <a:t>Adithya leads. Say plainly that the queue is a local file and the project runs in Studio only - our Orchestrator access ended before the final review. The split per shipment is the design point. If there is time: set RunMode = DISPATCH in Config.xlsx, run Main, then open Workflows\Queue\Performer.xaml and Run File, and show that the counts and the audit trail match a batch run.</a:t>
             </a:r>
           </a:p>
         </p:txBody>
@@ -1211,7 +1211,7 @@
           <a:lstStyle/>
           <a:p>
             <a:r>
-              <a:t>Do not skip this slide. Answer plainly if asked - waffling reads as not knowing. The honest summary is that the gaps are all credentials, not capability: a live queue, a live API key, the browser extension, and real mail and chat endpoints. Each path is exercised locally up to the final hop. This is also the slide that shortened most since Review 2, because the PDF, webhooks, ledger export and Performer all moved from the right column to the left.</a:t>
+              <a:t>Do not skip this slide. Answer plainly if asked - waffling reads as not knowing. The honest summary: Orchestrator is out of scope because the project runs in Studio only, and the other gaps are accounts or tools, not capability - a live API key, the browser extension, and real mail and chat endpoints. Each path is exercised locally up to the final hop. This is also the slide that shortened most since Review 2, because the PDF, webhooks, ledger export and Performer all moved from the right column to the left.</a:t>
             </a:r>
           </a:p>
         </p:txBody>
@@ -8793,7 +8793,7 @@
                 </a:solidFill>
                 <a:latin typeface="Calibri"/>
               </a:rPr>
-              <a:t>The e-mail, the Teams Adaptive Card and the Slack Block Kit message, written to disk so delivery is testable without a tenant.</a:t>
+              <a:t>The e-mail, the Teams Adaptive Card and the Slack Block Kit message, written to disk so delivery is testable without a real Teams or Slack channel.</a:t>
             </a:r>
           </a:p>
         </p:txBody>
@@ -9077,7 +9077,7 @@
                 </a:solidFill>
                 <a:latin typeface="Calibri"/>
               </a:rPr>
-              <a:t>SAME PIPELINE, ENTERPRISE VOLUME</a:t>
+              <a:t>SAME PIPELINE, SPLIT PER SHIPMENT</a:t>
             </a:r>
           </a:p>
         </p:txBody>
@@ -9427,7 +9427,7 @@
                 </a:solidFill>
                 <a:latin typeface="Calibri"/>
               </a:rPr>
-              <a:t>One Orchestrator queue item per shipment: 48 → 12.</a:t>
+              <a:t>One work item per shipment, in a local queue file: 48 → 12.</a:t>
             </a:r>
           </a:p>
         </p:txBody>
@@ -9698,7 +9698,7 @@
                 </a:solidFill>
                 <a:latin typeface="Calibri"/>
               </a:rPr>
-              <a:t>It drains the queue in one job and then calls 14_Finalise_Run - the same finalise pipeline a batch run uses. So queue mode produces the same audit trail, the same Excel and PDF reports and the same dashboard, rather than a second, divergent path that would need its own evidence.</a:t>
+              <a:t>Run from Studio, it works through the queue and then calls 14_Finalise_Run - the same finalise pipeline a batch run uses. So queue mode produces the same audit trail, the same Excel and PDF reports and the same dashboard, rather than a second, divergent path that would need its own evidence.</a:t>
             </a:r>
           </a:p>
         </p:txBody>
@@ -9779,7 +9779,7 @@
                 </a:solidFill>
                 <a:latin typeface="Calibri"/>
               </a:rPr>
-              <a:t>Stated plainly: this is the one untested hop</a:t>
+              <a:t>Runs in UiPath Studio - Orchestrator is out of scope</a:t>
             </a:r>
           </a:p>
         </p:txBody>
@@ -9814,7 +9814,7 @@
                 </a:solidFill>
                 <a:latin typeface="Calibri"/>
               </a:rPr>
-              <a:t>Dispatcher and Performer are exercised end to end in DRYRUN - 48 transactions become 12 payloads, and the Performer processes them and produces a full evidence pack. Add Queue Item, Get Transaction Item and Set Transaction Status have never run against a live Orchestrator queue.</a:t>
+              <a:t>The work queue is a local file. Dispatcher and Performer are verified end to end: 48 transactions become 12 work items, and the Performer turns them into the same evidence pack as a batch run. Moving to an Orchestrator queue would swap that file for Add Queue Item and Get Transaction Item - the validation would not change.</a:t>
             </a:r>
           </a:p>
         </p:txBody>
@@ -10028,7 +10028,7 @@
                 </a:solidFill>
                 <a:latin typeface="Calibri"/>
               </a:rPr>
-              <a:t>19/19</a:t>
+              <a:t>21/21</a:t>
             </a:r>
           </a:p>
         </p:txBody>
@@ -10146,7 +10146,7 @@
                 </a:solidFill>
                 <a:latin typeface="Calibri"/>
               </a:rPr>
-              <a:t>11/11</a:t>
+              <a:t>12/12</a:t>
             </a:r>
           </a:p>
         </p:txBody>
@@ -10382,7 +10382,7 @@
                 </a:solidFill>
                 <a:latin typeface="Calibri"/>
               </a:rPr>
-              <a:t>59/59</a:t>
+              <a:t>58/58</a:t>
             </a:r>
           </a:p>
         </p:txBody>
@@ -11060,7 +11060,7 @@
                 </a:solidFill>
                 <a:latin typeface="Calibri"/>
               </a:rPr>
-              <a:t>Dispatch splits 48 transactions into 12 queue items</a:t>
+              <a:t>Dispatch splits 48 transactions into 12 work items</a:t>
             </a:r>
           </a:p>
         </p:txBody>
@@ -11130,7 +11130,7 @@
                 </a:solidFill>
                 <a:latin typeface="Calibri"/>
               </a:rPr>
-              <a:t>The Performer drains a queue and finalises the run</a:t>
+              <a:t>The Performer works through the queue and finalises the run</a:t>
             </a:r>
           </a:p>
         </p:txBody>
@@ -11318,7 +11318,7 @@
                 </a:solidFill>
                 <a:latin typeface="Calibri"/>
               </a:rPr>
-              <a:t>Six drive one validation rule each against fixtures built inside the test, so a failure points at exactly one rule. The other five cover audit-chain tampering, field-mapping equivalence across two schemas, PDF structure, the review form's timeout, and the Teams and Slack payloads.</a:t>
+              <a:t>Six drive one validation rule each against fixtures built inside the test, so a failure points at exactly one rule. The other six cover audit-chain tampering, field-mapping equivalence across two schemas, PDF structure, the review form's timeout, the Teams and Slack payloads, and ledger noise.</a:t>
             </a:r>
           </a:p>
         </p:txBody>
@@ -12337,7 +12337,7 @@
                 </a:solidFill>
                 <a:latin typeface="Calibri"/>
               </a:rPr>
-              <a:t>Escalation capture in simulated and unattended modes</a:t>
+              <a:t>Escalation: review window answered via UI Automation</a:t>
             </a:r>
           </a:p>
         </p:txBody>
@@ -12617,7 +12617,7 @@
                 </a:solidFill>
                 <a:latin typeface="Calibri"/>
               </a:rPr>
-              <a:t>Dispatcher and Performer end to end in dry run</a:t>
+              <a:t>Dispatcher and Performer end to end through a work queue</a:t>
             </a:r>
           </a:p>
         </p:txBody>
@@ -12781,7 +12781,7 @@
                 </a:solidFill>
                 <a:latin typeface="Calibri"/>
               </a:rPr>
-              <a:t>Live Orchestrator queue</a:t>
+              <a:t>Orchestrator - out of scope</a:t>
             </a:r>
           </a:p>
         </p:txBody>
@@ -12816,7 +12816,7 @@
                 </a:solidFill>
                 <a:latin typeface="Calibri"/>
               </a:rPr>
-              <a:t>Dispatch and perform are verified in dry run; the three queue activities have not run against a live tenant.</a:t>
+              <a:t>The project runs in UiPath Studio only. Queue mode uses a local work-queue file instead of an Orchestrator queue.</a:t>
             </a:r>
           </a:p>
         </p:txBody>
@@ -12886,7 +12886,7 @@
                 </a:solidFill>
                 <a:latin typeface="Calibri"/>
               </a:rPr>
-              <a:t>API mode shares the parser the tested paths use, but no key is configured, so it has not been run against the live chain.</a:t>
+              <a:t>API mode is tested over HTTP against a local Etherscan stand-in, but no real key is configured, so it has not been run against the live chain.</a:t>
             </a:r>
           </a:p>
         </p:txBody>
@@ -13109,7 +13109,7 @@
                 </a:solidFill>
                 <a:latin typeface="Calibri"/>
               </a:rPr>
-              <a:t>Nothing is stubbed. Every gap above is a hop into a system this project holds no credentials for - and each one is exercised locally right up to that hop.</a:t>
+              <a:t>Nothing is stubbed. Each path above is exercised locally right up to the hop this project has no account or tool for.</a:t>
             </a:r>
           </a:p>
         </p:txBody>
@@ -13446,7 +13446,7 @@
                 </a:solidFill>
                 <a:latin typeface="Calibri"/>
               </a:rPr>
-              <a:t>Close the queue loop</a:t>
+              <a:t>Deploy to Orchestrator</a:t>
             </a:r>
           </a:p>
         </p:txBody>
@@ -13481,7 +13481,7 @@
                 </a:solidFill>
                 <a:latin typeface="Calibri"/>
               </a:rPr>
-              <a:t>Run Dispatcher and Performer against a live Orchestrator queue and measure throughput under parallel workers.</a:t>
+              <a:t>Publish the package, schedule it with time triggers, and swap the local work-queue file for an Orchestrator queue with parallel workers.</a:t>
             </a:r>
           </a:p>
         </p:txBody>
@@ -15766,7 +15766,7 @@
                 </a:solidFill>
                 <a:latin typeface="Calibri"/>
               </a:rPr>
-              <a:t>Its own entry point: drains the queue, then runs the same finalise pipeline as a batch run.</a:t>
+              <a:t>Its own entry point: works through the work queue, then runs the same finalise pipeline as a batch run.</a:t>
             </a:r>
           </a:p>
         </p:txBody>
